--- a/public/fun/cards/public/명함_공무원_18_딥코발트.pptx
+++ b/public/fun/cards/public/명함_공무원_18_딥코발트.pptx
@@ -3777,7 +3777,7 @@
                 <a:latin typeface="바탕"/>
                 <a:ea typeface="바탕"/>
               </a:rPr>
-              <a:t>문화 · 체육  ·  노인 복지  ·  보육 지원</a:t>
+              <a:t>문화 · 체육  ·  생활 복지  ·  보육 지원</a:t>
             </a:r>
           </a:p>
         </p:txBody>

--- a/public/fun/cards/public/명함_공무원_18_딥코발트.pptx
+++ b/public/fun/cards/public/명함_공무원_18_딥코발트.pptx
@@ -3777,7 +3777,7 @@
                 <a:latin typeface="바탕"/>
                 <a:ea typeface="바탕"/>
               </a:rPr>
-              <a:t>문화 · 체육  ·  생활 복지  ·  보육 지원</a:t>
+              <a:t>문화 · 체육  ·  노인 복지  ·  보육 지원</a:t>
             </a:r>
           </a:p>
         </p:txBody>
